--- a/templates/posts/october/2026-10-17-sat-ig-can-this-go-in-my-compost.pptx
+++ b/templates/posts/october/2026-10-17-sat-ig-can-this-go-in-my-compost.pptx
@@ -4143,7 +4143,7 @@
     <p:bg>
       <p:bgPr>
         <a:solidFill>
-          <a:srgbClr val="F4F1EA"/>
+          <a:srgbClr val="F3F1EA"/>
         </a:solidFill>
         <a:effectLst/>
       </p:bgPr>
@@ -4172,7 +4172,7 @@
             </a:avLst>
           </a:prstGeom>
           <a:solidFill>
-            <a:srgbClr val="156826"/>
+            <a:srgbClr val="31662F"/>
           </a:solidFill>
           <a:ln>
             <a:noFill/>
@@ -4231,7 +4231,7 @@
             <a:r>
               <a:rPr sz="2000" b="1" i="0" spc="200">
                 <a:solidFill>
-                  <a:srgbClr val="F4F1EA"/>
+                  <a:srgbClr val="F3F1EA"/>
                 </a:solidFill>
                 <a:latin typeface="Montserrat"/>
               </a:rPr>
@@ -4270,7 +4270,7 @@
             <a:r>
               <a:rPr sz="5600" b="1" i="0">
                 <a:solidFill>
-                  <a:srgbClr val="22371F"/>
+                  <a:srgbClr val="1E3F1D"/>
                 </a:solidFill>
                 <a:latin typeface="Montserrat"/>
               </a:rPr>
@@ -4674,7 +4674,7 @@
     <p:bg>
       <p:bgPr>
         <a:solidFill>
-          <a:srgbClr val="F4F1EA"/>
+          <a:srgbClr val="F3F1EA"/>
         </a:solidFill>
         <a:effectLst/>
       </p:bgPr>
@@ -4786,7 +4786,7 @@
             <a:avLst/>
           </a:prstGeom>
           <a:solidFill>
-            <a:srgbClr val="59A66C"/>
+            <a:srgbClr val="31662F"/>
           </a:solidFill>
           <a:ln>
             <a:noFill/>
@@ -4857,7 +4857,7 @@
             </a:pathLst>
           </a:custGeom>
           <a:solidFill>
-            <a:srgbClr val="F4F1EA"/>
+            <a:srgbClr val="F3F1EA"/>
           </a:solidFill>
           <a:ln>
             <a:noFill/>
@@ -4916,7 +4916,7 @@
             <a:r>
               <a:rPr sz="5600" b="1" i="0">
                 <a:solidFill>
-                  <a:srgbClr val="22371F"/>
+                  <a:srgbClr val="1E3F1D"/>
                 </a:solidFill>
                 <a:latin typeface="Montserrat"/>
               </a:rPr>
@@ -5019,7 +5019,7 @@
     <p:bg>
       <p:bgPr>
         <a:solidFill>
-          <a:srgbClr val="F4F1EA"/>
+          <a:srgbClr val="F3F1EA"/>
         </a:solidFill>
         <a:effectLst/>
       </p:bgPr>
@@ -5131,7 +5131,7 @@
             <a:avLst/>
           </a:prstGeom>
           <a:solidFill>
-            <a:srgbClr val="59A66C"/>
+            <a:srgbClr val="31662F"/>
           </a:solidFill>
           <a:ln>
             <a:noFill/>
@@ -5202,7 +5202,7 @@
             </a:pathLst>
           </a:custGeom>
           <a:solidFill>
-            <a:srgbClr val="F4F1EA"/>
+            <a:srgbClr val="F3F1EA"/>
           </a:solidFill>
           <a:ln>
             <a:noFill/>
@@ -5261,7 +5261,7 @@
             <a:r>
               <a:rPr sz="5600" b="1" i="0">
                 <a:solidFill>
-                  <a:srgbClr val="22371F"/>
+                  <a:srgbClr val="1E3F1D"/>
                 </a:solidFill>
                 <a:latin typeface="Montserrat"/>
               </a:rPr>
@@ -5364,7 +5364,7 @@
     <p:bg>
       <p:bgPr>
         <a:solidFill>
-          <a:srgbClr val="F4F1EA"/>
+          <a:srgbClr val="F3F1EA"/>
         </a:solidFill>
         <a:effectLst/>
       </p:bgPr>
@@ -5476,7 +5476,7 @@
             <a:avLst/>
           </a:prstGeom>
           <a:solidFill>
-            <a:srgbClr val="59A66C"/>
+            <a:srgbClr val="31662F"/>
           </a:solidFill>
           <a:ln>
             <a:noFill/>
@@ -5547,7 +5547,7 @@
             </a:pathLst>
           </a:custGeom>
           <a:solidFill>
-            <a:srgbClr val="F4F1EA"/>
+            <a:srgbClr val="F3F1EA"/>
           </a:solidFill>
           <a:ln>
             <a:noFill/>
@@ -5606,7 +5606,7 @@
             <a:r>
               <a:rPr sz="5600" b="1" i="0">
                 <a:solidFill>
-                  <a:srgbClr val="22371F"/>
+                  <a:srgbClr val="1E3F1D"/>
                 </a:solidFill>
                 <a:latin typeface="Montserrat"/>
               </a:rPr>
@@ -5709,7 +5709,7 @@
     <p:bg>
       <p:bgPr>
         <a:solidFill>
-          <a:srgbClr val="F4F1EA"/>
+          <a:srgbClr val="F3F1EA"/>
         </a:solidFill>
         <a:effectLst/>
       </p:bgPr>
@@ -5821,7 +5821,7 @@
             <a:avLst/>
           </a:prstGeom>
           <a:solidFill>
-            <a:srgbClr val="59A66C"/>
+            <a:srgbClr val="31662F"/>
           </a:solidFill>
           <a:ln>
             <a:noFill/>
@@ -5892,7 +5892,7 @@
             </a:pathLst>
           </a:custGeom>
           <a:solidFill>
-            <a:srgbClr val="F4F1EA"/>
+            <a:srgbClr val="F3F1EA"/>
           </a:solidFill>
           <a:ln>
             <a:noFill/>
@@ -5951,7 +5951,7 @@
             <a:r>
               <a:rPr sz="5600" b="1" i="0">
                 <a:solidFill>
-                  <a:srgbClr val="22371F"/>
+                  <a:srgbClr val="1E3F1D"/>
                 </a:solidFill>
                 <a:latin typeface="Montserrat"/>
               </a:rPr>
@@ -6054,7 +6054,7 @@
     <p:bg>
       <p:bgPr>
         <a:solidFill>
-          <a:srgbClr val="F4F1EA"/>
+          <a:srgbClr val="F3F1EA"/>
         </a:solidFill>
         <a:effectLst/>
       </p:bgPr>
@@ -6166,7 +6166,7 @@
             <a:avLst/>
           </a:prstGeom>
           <a:solidFill>
-            <a:srgbClr val="59A66C"/>
+            <a:srgbClr val="31662F"/>
           </a:solidFill>
           <a:ln>
             <a:noFill/>
@@ -6237,7 +6237,7 @@
             </a:pathLst>
           </a:custGeom>
           <a:solidFill>
-            <a:srgbClr val="F4F1EA"/>
+            <a:srgbClr val="F3F1EA"/>
           </a:solidFill>
           <a:ln>
             <a:noFill/>
@@ -6281,7 +6281,7 @@
             <a:avLst/>
           </a:prstGeom>
           <a:solidFill>
-            <a:srgbClr val="C9A227"/>
+            <a:srgbClr val="D39C48"/>
           </a:solidFill>
           <a:ln>
             <a:noFill/>
@@ -6340,7 +6340,7 @@
             <a:r>
               <a:rPr sz="6000" b="1" i="0">
                 <a:solidFill>
-                  <a:srgbClr val="22371F"/>
+                  <a:srgbClr val="1E3F1D"/>
                 </a:solidFill>
                 <a:latin typeface="Montserrat"/>
               </a:rPr>
@@ -6379,7 +6379,7 @@
             <a:r>
               <a:rPr sz="5600" b="1" i="0">
                 <a:solidFill>
-                  <a:srgbClr val="22371F"/>
+                  <a:srgbClr val="1E3F1D"/>
                 </a:solidFill>
                 <a:latin typeface="Montserrat"/>
               </a:rPr>
@@ -6482,7 +6482,7 @@
     <p:bg>
       <p:bgPr>
         <a:solidFill>
-          <a:srgbClr val="F4F1EA"/>
+          <a:srgbClr val="F3F1EA"/>
         </a:solidFill>
         <a:effectLst/>
       </p:bgPr>
@@ -6594,7 +6594,7 @@
             <a:avLst/>
           </a:prstGeom>
           <a:solidFill>
-            <a:srgbClr val="C9A227"/>
+            <a:srgbClr val="D39C48"/>
           </a:solidFill>
           <a:ln>
             <a:noFill/>
@@ -6653,7 +6653,7 @@
             <a:r>
               <a:rPr sz="6000" b="1" i="0">
                 <a:solidFill>
-                  <a:srgbClr val="22371F"/>
+                  <a:srgbClr val="1E3F1D"/>
                 </a:solidFill>
                 <a:latin typeface="Montserrat"/>
               </a:rPr>
@@ -6692,7 +6692,7 @@
             <a:r>
               <a:rPr sz="5600" b="1" i="0">
                 <a:solidFill>
-                  <a:srgbClr val="22371F"/>
+                  <a:srgbClr val="1E3F1D"/>
                 </a:solidFill>
                 <a:latin typeface="Montserrat"/>
               </a:rPr>
@@ -6795,7 +6795,7 @@
     <p:bg>
       <p:bgPr>
         <a:solidFill>
-          <a:srgbClr val="F4F1EA"/>
+          <a:srgbClr val="F3F1EA"/>
         </a:solidFill>
         <a:effectLst/>
       </p:bgPr>
@@ -6907,7 +6907,7 @@
             <a:avLst/>
           </a:prstGeom>
           <a:solidFill>
-            <a:srgbClr val="C9A227"/>
+            <a:srgbClr val="D39C48"/>
           </a:solidFill>
           <a:ln>
             <a:noFill/>
@@ -6966,7 +6966,7 @@
             <a:r>
               <a:rPr sz="6000" b="1" i="0">
                 <a:solidFill>
-                  <a:srgbClr val="22371F"/>
+                  <a:srgbClr val="1E3F1D"/>
                 </a:solidFill>
                 <a:latin typeface="Montserrat"/>
               </a:rPr>
@@ -7005,7 +7005,7 @@
             <a:r>
               <a:rPr sz="5600" b="1" i="0">
                 <a:solidFill>
-                  <a:srgbClr val="22371F"/>
+                  <a:srgbClr val="1E3F1D"/>
                 </a:solidFill>
                 <a:latin typeface="Montserrat"/>
               </a:rPr>
@@ -7108,7 +7108,7 @@
     <p:bg>
       <p:bgPr>
         <a:solidFill>
-          <a:srgbClr val="F4F1EA"/>
+          <a:srgbClr val="F3F1EA"/>
         </a:solidFill>
         <a:effectLst/>
       </p:bgPr>
@@ -7220,7 +7220,7 @@
             <a:avLst/>
           </a:prstGeom>
           <a:solidFill>
-            <a:srgbClr val="59A66C"/>
+            <a:srgbClr val="31662F"/>
           </a:solidFill>
           <a:ln>
             <a:noFill/>
@@ -7291,7 +7291,7 @@
             </a:pathLst>
           </a:custGeom>
           <a:solidFill>
-            <a:srgbClr val="F4F1EA"/>
+            <a:srgbClr val="F3F1EA"/>
           </a:solidFill>
           <a:ln>
             <a:noFill/>
@@ -7350,7 +7350,7 @@
             <a:r>
               <a:rPr sz="5600" b="1" i="0">
                 <a:solidFill>
-                  <a:srgbClr val="22371F"/>
+                  <a:srgbClr val="1E3F1D"/>
                 </a:solidFill>
                 <a:latin typeface="Montserrat"/>
               </a:rPr>
@@ -7453,7 +7453,7 @@
     <p:bg>
       <p:bgPr>
         <a:solidFill>
-          <a:srgbClr val="F4F1EA"/>
+          <a:srgbClr val="F3F1EA"/>
         </a:solidFill>
         <a:effectLst/>
       </p:bgPr>
@@ -7565,7 +7565,7 @@
             <a:avLst/>
           </a:prstGeom>
           <a:solidFill>
-            <a:srgbClr val="59A66C"/>
+            <a:srgbClr val="31662F"/>
           </a:solidFill>
           <a:ln>
             <a:noFill/>
@@ -7636,7 +7636,7 @@
             </a:pathLst>
           </a:custGeom>
           <a:solidFill>
-            <a:srgbClr val="F4F1EA"/>
+            <a:srgbClr val="F3F1EA"/>
           </a:solidFill>
           <a:ln>
             <a:noFill/>
@@ -7695,7 +7695,7 @@
             <a:r>
               <a:rPr sz="5600" b="1" i="0">
                 <a:solidFill>
-                  <a:srgbClr val="22371F"/>
+                  <a:srgbClr val="1E3F1D"/>
                 </a:solidFill>
                 <a:latin typeface="Montserrat"/>
               </a:rPr>
